--- a/docs_report/MedPartners_113.pptx
+++ b/docs_report/MedPartners_113.pptx
@@ -7684,7 +7684,7 @@
                 <a:ea typeface="Space Grotesk" pitchFamily="34" charset="-122"/>
                 <a:cs typeface="Space Grotesk" pitchFamily="34" charset="-120"/>
               </a:rPr>
-              <a:t>100%</a:t>
+              <a:t>27.59%</a:t>
             </a:r>
             <a:endParaRPr lang="en-US" sz="3200" dirty="0"/>
           </a:p>
@@ -7726,7 +7726,7 @@
                 <a:ea typeface="Space Grotesk" pitchFamily="34" charset="-122"/>
                 <a:cs typeface="Space Grotesk" pitchFamily="34" charset="-120"/>
               </a:rPr>
-              <a:t>по адресуемому знаменателю</a:t>
+              <a:t>авто по всем активным позициям</a:t>
             </a:r>
             <a:endParaRPr lang="en-US" sz="1150" dirty="0"/>
           </a:p>
@@ -7746,7 +7746,7 @@
                 <a:ea typeface="Space Grotesk" pitchFamily="34" charset="-122"/>
                 <a:cs typeface="Space Grotesk" pitchFamily="34" charset="-120"/>
               </a:rPr>
-              <a:t>код тарификатора резолвится в одну услугу</a:t>
+              <a:t>полный арбитр 0.40-0.85, /stats показывает вживую</a:t>
             </a:r>
             <a:endParaRPr lang="en-US" sz="1150" dirty="0"/>
           </a:p>
@@ -7819,7 +7819,7 @@
                 <a:ea typeface="Space Grotesk" pitchFamily="34" charset="-122"/>
                 <a:cs typeface="Space Grotesk" pitchFamily="34" charset="-120"/>
               </a:rPr>
-              <a:t>23.70%</a:t>
+              <a:t>38.04%</a:t>
             </a:r>
             <a:endParaRPr lang="en-US" sz="2800" dirty="0"/>
           </a:p>
@@ -7861,7 +7861,7 @@
                 <a:ea typeface="Space Grotesk" pitchFamily="34" charset="-122"/>
                 <a:cs typeface="Space Grotesk" pitchFamily="34" charset="-120"/>
               </a:rPr>
-              <a:t>авто по всем активным позициям</a:t>
+              <a:t>по адресуемому знаменателю</a:t>
             </a:r>
             <a:endParaRPr lang="en-US" sz="1150" dirty="0"/>
           </a:p>
@@ -7881,7 +7881,7 @@
                 <a:ea typeface="Space Grotesk" pitchFamily="34" charset="-122"/>
                 <a:cs typeface="Space Grotesk" pitchFamily="34" charset="-120"/>
               </a:rPr>
-              <a:t>честная метрика /stats, Прогон 4</a:t>
+              <a:t>позиции, у которых пара есть в справочнике</a:t>
             </a:r>
             <a:endParaRPr lang="en-US" sz="1150" dirty="0"/>
           </a:p>
@@ -7947,7 +7947,7 @@
                 <a:ea typeface="Space Grotesk" pitchFamily="34" charset="-122"/>
                 <a:cs typeface="Space Grotesk" pitchFamily="34" charset="-120"/>
               </a:rPr>
-              <a:t>88.8%</a:t>
+              <a:t>96.6%</a:t>
             </a:r>
             <a:endParaRPr lang="en-US" sz="2800" dirty="0"/>
           </a:p>
@@ -8009,7 +8009,7 @@
                 <a:ea typeface="Space Grotesk" pitchFamily="34" charset="-122"/>
                 <a:cs typeface="Space Grotesk" pitchFamily="34" charset="-120"/>
               </a:rPr>
-              <a:t>+15.98 п.п. от LLM-арбитра в семантической зоне</a:t>
+              <a:t>сверка с код-истиной, выше целевых 85%</a:t>
             </a:r>
             <a:endParaRPr lang="en-US" sz="1150" dirty="0"/>
           </a:p>
@@ -8075,7 +8075,7 @@
                 <a:ea typeface="Space Grotesk" pitchFamily="34" charset="-122"/>
                 <a:cs typeface="Space Grotesk" pitchFamily="34" charset="-120"/>
               </a:rPr>
-              <a:t>$0.20</a:t>
+              <a:t>$0.16</a:t>
             </a:r>
             <a:endParaRPr lang="en-US" sz="2800" dirty="0"/>
           </a:p>
@@ -8117,7 +8117,7 @@
                 <a:ea typeface="Space Grotesk" pitchFamily="34" charset="-122"/>
                 <a:cs typeface="Space Grotesk" pitchFamily="34" charset="-120"/>
               </a:rPr>
-              <a:t>стоимость полного прогона</a:t>
+              <a:t>стоимость прогона арбитра</a:t>
             </a:r>
             <a:endParaRPr lang="en-US" sz="1150" dirty="0"/>
           </a:p>
@@ -10866,7 +10866,7 @@
                 <a:ea typeface="Space Grotesk" pitchFamily="34" charset="-122"/>
                 <a:cs typeface="Space Grotesk" pitchFamily="34" charset="-120"/>
               </a:rPr>
-              <a:t>100%</a:t>
+              <a:t>27.59%</a:t>
             </a:r>
             <a:endParaRPr lang="en-US" sz="2700" dirty="0"/>
           </a:p>
@@ -10905,7 +10905,7 @@
                 <a:ea typeface="JetBrains Mono" pitchFamily="34" charset="-122"/>
                 <a:cs typeface="JetBrains Mono" pitchFamily="34" charset="-120"/>
               </a:rPr>
-              <a:t>авто по коду</a:t>
+              <a:t>авто нормализации</a:t>
             </a:r>
             <a:endParaRPr lang="en-US" sz="1000" dirty="0"/>
           </a:p>
@@ -10978,7 +10978,7 @@
                 <a:ea typeface="Space Grotesk" pitchFamily="34" charset="-122"/>
                 <a:cs typeface="Space Grotesk" pitchFamily="34" charset="-120"/>
               </a:rPr>
-              <a:t>88.8%</a:t>
+              <a:t>96.6%</a:t>
             </a:r>
             <a:endParaRPr lang="en-US" sz="2700" dirty="0"/>
           </a:p>
